--- a/src/native-pptx/test-fixtures/slides-ci-native.pptx
+++ b/src/native-pptx/test-fixtures/slides-ci-native.pptx
@@ -20139,7 +20139,49 @@
       </p:sp>
       <p:sp>
         <p:nvSpPr>
-          <p:cNvPr id="5" name="Shape 3"/>
+          <p:cNvPr id="5" name="Text 3"/>
+          <p:cNvSpPr/>
+          <p:nvPr/>
+        </p:nvSpPr>
+        <p:spPr>
+          <a:xfrm>
+            <a:off x="2591246" y="2742307"/>
+            <a:ext cx="1368475" cy="352425"/>
+          </a:xfrm>
+          <a:prstGeom prst="rect">
+            <a:avLst/>
+          </a:prstGeom>
+          <a:noFill/>
+          <a:ln/>
+        </p:spPr>
+        <p:txBody>
+          <a:bodyPr wrap="square" lIns="0" tIns="0" rIns="0" bIns="0" rtlCol="0" anchor="ctr"/>
+          <a:lstStyle/>
+          <a:p>
+            <a:pPr algn="ctr" indent="0" marL="0">
+              <a:lnSpc>
+                <a:spcPct val="100000"/>
+              </a:lnSpc>
+              <a:buNone/>
+            </a:pPr>
+            <a:r>
+              <a:rPr lang="en-US" sz="1849" dirty="0">
+                <a:solidFill>
+                  <a:srgbClr val="FFFFFF"/>
+                </a:solidFill>
+                <a:latin typeface="Segoe UI" pitchFamily="34" charset="0"/>
+                <a:ea typeface="Segoe UI" pitchFamily="34" charset="-122"/>
+                <a:cs typeface="Segoe UI" pitchFamily="34" charset="-120"/>
+              </a:rPr>
+              <a:t>Not started</a:t>
+            </a:r>
+            <a:endParaRPr lang="en-US" sz="1849" dirty="0"/>
+          </a:p>
+        </p:txBody>
+      </p:sp>
+      <p:sp>
+        <p:nvSpPr>
+          <p:cNvPr id="6" name="Shape 4"/>
           <p:cNvSpPr/>
           <p:nvPr/>
         </p:nvSpPr>
@@ -20161,7 +20203,49 @@
       </p:sp>
       <p:sp>
         <p:nvSpPr>
-          <p:cNvPr id="6" name="Shape 4"/>
+          <p:cNvPr id="7" name="Text 5"/>
+          <p:cNvSpPr/>
+          <p:nvPr/>
+        </p:nvSpPr>
+        <p:spPr>
+          <a:xfrm>
+            <a:off x="2048173" y="3156645"/>
+            <a:ext cx="1349425" cy="352425"/>
+          </a:xfrm>
+          <a:prstGeom prst="rect">
+            <a:avLst/>
+          </a:prstGeom>
+          <a:noFill/>
+          <a:ln/>
+        </p:spPr>
+        <p:txBody>
+          <a:bodyPr wrap="square" lIns="0" tIns="0" rIns="0" bIns="0" rtlCol="0" anchor="ctr"/>
+          <a:lstStyle/>
+          <a:p>
+            <a:pPr algn="ctr" indent="0" marL="0">
+              <a:lnSpc>
+                <a:spcPct val="100000"/>
+              </a:lnSpc>
+              <a:buNone/>
+            </a:pPr>
+            <a:r>
+              <a:rPr lang="en-US" sz="1849" dirty="0">
+                <a:solidFill>
+                  <a:srgbClr val="FFFFFF"/>
+                </a:solidFill>
+                <a:latin typeface="Segoe UI" pitchFamily="34" charset="0"/>
+                <a:ea typeface="Segoe UI" pitchFamily="34" charset="-122"/>
+                <a:cs typeface="Segoe UI" pitchFamily="34" charset="-120"/>
+              </a:rPr>
+              <a:t>In progress</a:t>
+            </a:r>
+            <a:endParaRPr lang="en-US" sz="1849" dirty="0"/>
+          </a:p>
+        </p:txBody>
+      </p:sp>
+      <p:sp>
+        <p:nvSpPr>
+          <p:cNvPr id="8" name="Shape 6"/>
           <p:cNvSpPr/>
           <p:nvPr/>
         </p:nvSpPr>
@@ -20183,7 +20267,66 @@
       </p:sp>
       <p:sp>
         <p:nvSpPr>
-          <p:cNvPr id="7" name="Text 5"/>
+          <p:cNvPr id="9" name="Text 7"/>
+          <p:cNvSpPr/>
+          <p:nvPr/>
+        </p:nvSpPr>
+        <p:spPr>
+          <a:xfrm>
+            <a:off x="2065883" y="3570982"/>
+            <a:ext cx="1082427" cy="352425"/>
+          </a:xfrm>
+          <a:prstGeom prst="rect">
+            <a:avLst/>
+          </a:prstGeom>
+          <a:noFill/>
+          <a:ln/>
+        </p:spPr>
+        <p:txBody>
+          <a:bodyPr wrap="square" lIns="0" tIns="0" rIns="0" bIns="0" rtlCol="0" anchor="ctr"/>
+          <a:lstStyle/>
+          <a:p>
+            <a:pPr algn="ctr" indent="0" marL="0">
+              <a:lnSpc>
+                <a:spcPct val="100000"/>
+              </a:lnSpc>
+              <a:buNone/>
+            </a:pPr>
+            <a:r>
+              <a:rPr lang="en-US" sz="1849" dirty="0">
+                <a:solidFill>
+                  <a:srgbClr val="FFFFFF"/>
+                </a:solidFill>
+                <a:latin typeface="Segoe UI" pitchFamily="34" charset="0"/>
+                <a:ea typeface="Segoe UI" pitchFamily="34" charset="-122"/>
+                <a:cs typeface="Segoe UI" pitchFamily="34" charset="-120"/>
+              </a:rPr>
+              <a:t>Done </a:t>
+            </a:r>
+            <a:pPr algn="ctr" indent="0" marL="0">
+              <a:lnSpc>
+                <a:spcPct val="100000"/>
+              </a:lnSpc>
+              <a:buNone/>
+            </a:pPr>
+            <a:r>
+              <a:rPr lang="en-US" sz="1849" dirty="0">
+                <a:solidFill>
+                  <a:srgbClr val="FFFFFF"/>
+                </a:solidFill>
+                <a:latin typeface="Segoe UI" pitchFamily="34" charset="0"/>
+                <a:ea typeface="Segoe UI" pitchFamily="34" charset="-122"/>
+                <a:cs typeface="Segoe UI" pitchFamily="34" charset="-120"/>
+              </a:rPr>
+              <a:t>✅</a:t>
+            </a:r>
+            <a:endParaRPr lang="en-US" sz="1849" dirty="0"/>
+          </a:p>
+        </p:txBody>
+      </p:sp>
+      <p:sp>
+        <p:nvSpPr>
+          <p:cNvPr id="10" name="Text 8"/>
           <p:cNvSpPr/>
           <p:nvPr/>
         </p:nvSpPr>
@@ -20225,23 +20368,6 @@
               </a:lnSpc>
               <a:buNone/>
             </a:pPr>
-            <a:r>
-              <a:rPr lang="en-US" sz="1849" dirty="0">
-                <a:solidFill>
-                  <a:srgbClr val="FFFFFF"/>
-                </a:solidFill>
-                <a:latin typeface="Segoe UI" pitchFamily="34" charset="0"/>
-                <a:ea typeface="Segoe UI" pitchFamily="34" charset="-122"/>
-                <a:cs typeface="Segoe UI" pitchFamily="34" charset="-120"/>
-              </a:rPr>
-              <a:t>Not started</a:t>
-            </a:r>
-            <a:pPr algn="l" indent="0" marL="0">
-              <a:lnSpc>
-                <a:spcPct val="150000"/>
-              </a:lnSpc>
-              <a:buNone/>
-            </a:pPr>
             <a:endParaRPr lang="en-US" sz="2175" dirty="0"/>
           </a:p>
           <a:p>
@@ -20268,23 +20394,6 @@
               </a:lnSpc>
               <a:buNone/>
             </a:pPr>
-            <a:r>
-              <a:rPr lang="en-US" sz="1849" dirty="0">
-                <a:solidFill>
-                  <a:srgbClr val="FFFFFF"/>
-                </a:solidFill>
-                <a:latin typeface="Segoe UI" pitchFamily="34" charset="0"/>
-                <a:ea typeface="Segoe UI" pitchFamily="34" charset="-122"/>
-                <a:cs typeface="Segoe UI" pitchFamily="34" charset="-120"/>
-              </a:rPr>
-              <a:t>In progress</a:t>
-            </a:r>
-            <a:pPr algn="l" indent="0" marL="0">
-              <a:lnSpc>
-                <a:spcPct val="150000"/>
-              </a:lnSpc>
-              <a:buNone/>
-            </a:pPr>
             <a:endParaRPr lang="en-US" sz="2175" dirty="0"/>
           </a:p>
           <a:p>
@@ -20305,47 +20414,13 @@
               </a:rPr>
               <a:t>Complete: </a:t>
             </a:r>
-            <a:pPr algn="l" indent="0" marL="0">
-              <a:lnSpc>
-                <a:spcPct val="150000"/>
-              </a:lnSpc>
-              <a:buNone/>
-            </a:pPr>
-            <a:r>
-              <a:rPr lang="en-US" sz="1849" dirty="0">
-                <a:solidFill>
-                  <a:srgbClr val="FFFFFF"/>
-                </a:solidFill>
-                <a:latin typeface="Segoe UI" pitchFamily="34" charset="0"/>
-                <a:ea typeface="Segoe UI" pitchFamily="34" charset="-122"/>
-                <a:cs typeface="Segoe UI" pitchFamily="34" charset="-120"/>
-              </a:rPr>
-              <a:t>Done </a:t>
-            </a:r>
-            <a:pPr algn="l" indent="0" marL="0">
-              <a:lnSpc>
-                <a:spcPct val="150000"/>
-              </a:lnSpc>
-              <a:buNone/>
-            </a:pPr>
-            <a:r>
-              <a:rPr lang="en-US" sz="1849" dirty="0">
-                <a:solidFill>
-                  <a:srgbClr val="FFFFFF"/>
-                </a:solidFill>
-                <a:latin typeface="Segoe UI" pitchFamily="34" charset="0"/>
-                <a:ea typeface="Segoe UI" pitchFamily="34" charset="-122"/>
-                <a:cs typeface="Segoe UI" pitchFamily="34" charset="-120"/>
-              </a:rPr>
-              <a:t>✅</a:t>
-            </a:r>
             <a:endParaRPr lang="en-US" sz="2175" dirty="0"/>
           </a:p>
         </p:txBody>
       </p:sp>
       <p:sp>
         <p:nvSpPr>
-          <p:cNvPr id="8" name="Text 6"/>
+          <p:cNvPr id="11" name="Text 9"/>
           <p:cNvSpPr/>
           <p:nvPr/>
         </p:nvSpPr>
@@ -20387,7 +20462,7 @@
       </p:sp>
       <p:sp>
         <p:nvSpPr>
-          <p:cNvPr id="9" name="Shape 7"/>
+          <p:cNvPr id="12" name="Shape 10"/>
           <p:cNvSpPr/>
           <p:nvPr/>
         </p:nvSpPr>
@@ -20409,7 +20484,7 @@
       </p:sp>
       <p:sp>
         <p:nvSpPr>
-          <p:cNvPr id="10" name="Text 8"/>
+          <p:cNvPr id="13" name="Text 11"/>
           <p:cNvSpPr/>
           <p:nvPr/>
         </p:nvSpPr>
@@ -20451,7 +20526,7 @@
       </p:sp>
       <p:sp>
         <p:nvSpPr>
-          <p:cNvPr id="11" name="Shape 9"/>
+          <p:cNvPr id="14" name="Shape 12"/>
           <p:cNvSpPr/>
           <p:nvPr/>
         </p:nvSpPr>
@@ -20473,7 +20548,7 @@
       </p:sp>
       <p:sp>
         <p:nvSpPr>
-          <p:cNvPr id="12" name="Text 10"/>
+          <p:cNvPr id="15" name="Text 13"/>
           <p:cNvSpPr/>
           <p:nvPr/>
         </p:nvSpPr>
@@ -20515,7 +20590,7 @@
       </p:sp>
       <p:sp>
         <p:nvSpPr>
-          <p:cNvPr id="13" name="Shape 11"/>
+          <p:cNvPr id="16" name="Shape 14"/>
           <p:cNvSpPr/>
           <p:nvPr/>
         </p:nvSpPr>
@@ -20537,7 +20612,7 @@
       </p:sp>
       <p:sp>
         <p:nvSpPr>
-          <p:cNvPr id="14" name="Text 12"/>
+          <p:cNvPr id="17" name="Text 15"/>
           <p:cNvSpPr/>
           <p:nvPr/>
         </p:nvSpPr>
@@ -20579,7 +20654,7 @@
       </p:sp>
       <p:sp>
         <p:nvSpPr>
-          <p:cNvPr id="15" name="Text 13"/>
+          <p:cNvPr id="18" name="Text 16"/>
           <p:cNvSpPr/>
           <p:nvPr/>
         </p:nvSpPr>
@@ -20621,7 +20696,7 @@
       </p:sp>
       <p:sp>
         <p:nvSpPr>
-          <p:cNvPr id="16" name="Shape 14"/>
+          <p:cNvPr id="19" name="Shape 17"/>
           <p:cNvSpPr/>
           <p:nvPr/>
         </p:nvSpPr>
@@ -20643,7 +20718,7 @@
       </p:sp>
       <p:sp>
         <p:nvSpPr>
-          <p:cNvPr id="17" name="Text 15"/>
+          <p:cNvPr id="20" name="Text 18"/>
           <p:cNvSpPr/>
           <p:nvPr/>
         </p:nvSpPr>
@@ -20685,7 +20760,7 @@
       </p:sp>
       <p:sp>
         <p:nvSpPr>
-          <p:cNvPr id="18" name="Shape 16"/>
+          <p:cNvPr id="21" name="Shape 19"/>
           <p:cNvSpPr/>
           <p:nvPr/>
         </p:nvSpPr>
@@ -20707,7 +20782,7 @@
       </p:sp>
       <p:sp>
         <p:nvSpPr>
-          <p:cNvPr id="19" name="Shape 17"/>
+          <p:cNvPr id="22" name="Shape 20"/>
           <p:cNvSpPr/>
           <p:nvPr/>
         </p:nvSpPr>
@@ -20729,7 +20804,7 @@
       </p:sp>
       <p:sp>
         <p:nvSpPr>
-          <p:cNvPr id="20" name="Text 18"/>
+          <p:cNvPr id="23" name="Text 21"/>
           <p:cNvSpPr/>
           <p:nvPr/>
         </p:nvSpPr>
@@ -20873,7 +20948,7 @@
       </p:sp>
       <p:sp>
         <p:nvSpPr>
-          <p:cNvPr id="21" name="Text 19"/>
+          <p:cNvPr id="24" name="Text 22"/>
           <p:cNvSpPr/>
           <p:nvPr/>
         </p:nvSpPr>
@@ -21393,6 +21468,48 @@
         </p:nvSpPr>
         <p:spPr>
           <a:xfrm>
+            <a:off x="2220813" y="4519910"/>
+            <a:ext cx="1460302" cy="314325"/>
+          </a:xfrm>
+          <a:prstGeom prst="rect">
+            <a:avLst/>
+          </a:prstGeom>
+          <a:noFill/>
+          <a:ln/>
+        </p:spPr>
+        <p:txBody>
+          <a:bodyPr wrap="square" lIns="0" tIns="0" rIns="0" bIns="0" rtlCol="0" anchor="ctr"/>
+          <a:lstStyle/>
+          <a:p>
+            <a:pPr algn="ctr" indent="0" marL="0">
+              <a:lnSpc>
+                <a:spcPct val="100000"/>
+              </a:lnSpc>
+              <a:buNone/>
+            </a:pPr>
+            <a:r>
+              <a:rPr lang="en-US" sz="1740" dirty="0">
+                <a:solidFill>
+                  <a:srgbClr val="FFFFFF"/>
+                </a:solidFill>
+                <a:latin typeface="Segoe UI" pitchFamily="34" charset="0"/>
+                <a:ea typeface="Segoe UI" pitchFamily="34" charset="-122"/>
+                <a:cs typeface="Segoe UI" pitchFamily="34" charset="-120"/>
+              </a:rPr>
+              <a:t>Needs review</a:t>
+            </a:r>
+            <a:endParaRPr lang="en-US" sz="1740" dirty="0"/>
+          </a:p>
+        </p:txBody>
+      </p:sp>
+      <p:sp>
+        <p:nvSpPr>
+          <p:cNvPr id="10" name="Text 8"/>
+          <p:cNvSpPr/>
+          <p:nvPr/>
+        </p:nvSpPr>
+        <p:spPr>
+          <a:xfrm>
             <a:off x="747713" y="3969841"/>
             <a:ext cx="10696575" cy="897731"/>
           </a:xfrm>
@@ -21515,30 +21632,13 @@
               </a:rPr>
               <a:t>Review </a:t>
             </a:r>
-            <a:pPr algn="l" indent="0" marL="0">
-              <a:lnSpc>
-                <a:spcPct val="150000"/>
-              </a:lnSpc>
-              <a:buNone/>
-            </a:pPr>
-            <a:r>
-              <a:rPr lang="en-US" sz="1740" dirty="0">
-                <a:solidFill>
-                  <a:srgbClr val="FFFFFF"/>
-                </a:solidFill>
-                <a:latin typeface="Segoe UI" pitchFamily="34" charset="0"/>
-                <a:ea typeface="Segoe UI" pitchFamily="34" charset="-122"/>
-                <a:cs typeface="Segoe UI" pitchFamily="34" charset="-120"/>
-              </a:rPr>
-              <a:t>Needs review</a:t>
-            </a:r>
             <a:endParaRPr lang="en-US" sz="2175" dirty="0"/>
           </a:p>
         </p:txBody>
       </p:sp>
       <p:sp>
         <p:nvSpPr>
-          <p:cNvPr id="10" name="Text 8"/>
+          <p:cNvPr id="11" name="Text 9"/>
           <p:cNvSpPr/>
           <p:nvPr/>
         </p:nvSpPr>

--- a/src/native-pptx/test-fixtures/slides-ci-native.pptx
+++ b/src/native-pptx/test-fixtures/slides-ci-native.pptx
@@ -6526,8 +6526,8 @@
         </p:nvSpPr>
         <p:spPr>
           <a:xfrm>
-            <a:off x="0" y="5762625"/>
-            <a:ext cx="12192000" cy="1095375"/>
+            <a:off x="0" y="0"/>
+            <a:ext cx="12192000" cy="6858000"/>
           </a:xfrm>
           <a:prstGeom prst="rect">
             <a:avLst/>
@@ -6536,7 +6536,7 @@
           <a:ln/>
         </p:spPr>
         <p:txBody>
-          <a:bodyPr wrap="square" lIns="0" tIns="0" rIns="747713" bIns="0" rtlCol="0" anchor="t"/>
+          <a:bodyPr wrap="square" lIns="747713" tIns="0" rIns="747713" bIns="747713" rtlCol="0" anchor="b"/>
           <a:lstStyle/>
           <a:p>
             <a:pPr algn="r" indent="0" marL="0">
@@ -6774,8 +6774,8 @@
         </p:nvSpPr>
         <p:spPr>
           <a:xfrm>
-            <a:off x="0" y="5762625"/>
-            <a:ext cx="12192000" cy="1095375"/>
+            <a:off x="0" y="0"/>
+            <a:ext cx="12192000" cy="6858000"/>
           </a:xfrm>
           <a:prstGeom prst="rect">
             <a:avLst/>
@@ -6784,7 +6784,7 @@
           <a:ln/>
         </p:spPr>
         <p:txBody>
-          <a:bodyPr wrap="square" lIns="0" tIns="0" rIns="747713" bIns="0" rtlCol="0" anchor="t"/>
+          <a:bodyPr wrap="square" lIns="747713" tIns="0" rIns="747713" bIns="747713" rtlCol="0" anchor="b"/>
           <a:lstStyle/>
           <a:p>
             <a:pPr algn="r" indent="0" marL="0">
@@ -7064,8 +7064,8 @@
         </p:nvSpPr>
         <p:spPr>
           <a:xfrm>
-            <a:off x="0" y="5762625"/>
-            <a:ext cx="12192000" cy="1095375"/>
+            <a:off x="0" y="0"/>
+            <a:ext cx="12192000" cy="6858000"/>
           </a:xfrm>
           <a:prstGeom prst="rect">
             <a:avLst/>
@@ -7074,7 +7074,7 @@
           <a:ln/>
         </p:spPr>
         <p:txBody>
-          <a:bodyPr wrap="square" lIns="0" tIns="0" rIns="747713" bIns="0" rtlCol="0" anchor="t"/>
+          <a:bodyPr wrap="square" lIns="747713" tIns="0" rIns="747713" bIns="747713" rtlCol="0" anchor="b"/>
           <a:lstStyle/>
           <a:p>
             <a:pPr algn="r" indent="0" marL="0">
@@ -7271,8 +7271,8 @@
         </p:nvSpPr>
         <p:spPr>
           <a:xfrm>
-            <a:off x="0" y="5762625"/>
-            <a:ext cx="12192000" cy="1095375"/>
+            <a:off x="0" y="0"/>
+            <a:ext cx="12192000" cy="6858000"/>
           </a:xfrm>
           <a:prstGeom prst="rect">
             <a:avLst/>
@@ -7281,7 +7281,7 @@
           <a:ln/>
         </p:spPr>
         <p:txBody>
-          <a:bodyPr wrap="square" lIns="0" tIns="0" rIns="747713" bIns="0" rtlCol="0" anchor="t"/>
+          <a:bodyPr wrap="square" lIns="747713" tIns="0" rIns="747713" bIns="747713" rtlCol="0" anchor="b"/>
           <a:lstStyle/>
           <a:p>
             <a:pPr algn="r" indent="0" marL="0">
@@ -7505,8 +7505,8 @@
         </p:nvSpPr>
         <p:spPr>
           <a:xfrm>
-            <a:off x="0" y="5762625"/>
-            <a:ext cx="12192000" cy="1095375"/>
+            <a:off x="0" y="0"/>
+            <a:ext cx="12192000" cy="6858000"/>
           </a:xfrm>
           <a:prstGeom prst="rect">
             <a:avLst/>
@@ -7515,7 +7515,7 @@
           <a:ln/>
         </p:spPr>
         <p:txBody>
-          <a:bodyPr wrap="square" lIns="0" tIns="0" rIns="747713" bIns="0" rtlCol="0" anchor="t"/>
+          <a:bodyPr wrap="square" lIns="747713" tIns="0" rIns="747713" bIns="747713" rtlCol="0" anchor="b"/>
           <a:lstStyle/>
           <a:p>
             <a:pPr algn="r" indent="0" marL="0">
@@ -7792,8 +7792,8 @@
         </p:nvSpPr>
         <p:spPr>
           <a:xfrm>
-            <a:off x="0" y="5762625"/>
-            <a:ext cx="12192000" cy="1095375"/>
+            <a:off x="0" y="0"/>
+            <a:ext cx="12192000" cy="6858000"/>
           </a:xfrm>
           <a:prstGeom prst="rect">
             <a:avLst/>
@@ -7802,7 +7802,7 @@
           <a:ln/>
         </p:spPr>
         <p:txBody>
-          <a:bodyPr wrap="square" lIns="0" tIns="0" rIns="747713" bIns="0" rtlCol="0" anchor="t"/>
+          <a:bodyPr wrap="square" lIns="747713" tIns="0" rIns="747713" bIns="747713" rtlCol="0" anchor="b"/>
           <a:lstStyle/>
           <a:p>
             <a:pPr algn="r" indent="0" marL="0">
@@ -8300,8 +8300,8 @@
         </p:nvSpPr>
         <p:spPr>
           <a:xfrm>
-            <a:off x="0" y="5762625"/>
-            <a:ext cx="12192000" cy="1095375"/>
+            <a:off x="0" y="0"/>
+            <a:ext cx="12192000" cy="6858000"/>
           </a:xfrm>
           <a:prstGeom prst="rect">
             <a:avLst/>
@@ -8310,7 +8310,7 @@
           <a:ln/>
         </p:spPr>
         <p:txBody>
-          <a:bodyPr wrap="square" lIns="0" tIns="0" rIns="747713" bIns="0" rtlCol="0" anchor="t"/>
+          <a:bodyPr wrap="square" lIns="747713" tIns="0" rIns="747713" bIns="747713" rtlCol="0" anchor="b"/>
           <a:lstStyle/>
           <a:p>
             <a:pPr algn="r" indent="0" marL="0">
@@ -8692,8 +8692,8 @@
         </p:nvSpPr>
         <p:spPr>
           <a:xfrm>
-            <a:off x="0" y="5762625"/>
-            <a:ext cx="12192000" cy="1095375"/>
+            <a:off x="0" y="0"/>
+            <a:ext cx="12192000" cy="6858000"/>
           </a:xfrm>
           <a:prstGeom prst="rect">
             <a:avLst/>
@@ -8702,7 +8702,7 @@
           <a:ln/>
         </p:spPr>
         <p:txBody>
-          <a:bodyPr wrap="square" lIns="0" tIns="0" rIns="747713" bIns="0" rtlCol="0" anchor="t"/>
+          <a:bodyPr wrap="square" lIns="747713" tIns="0" rIns="747713" bIns="747713" rtlCol="0" anchor="b"/>
           <a:lstStyle/>
           <a:p>
             <a:pPr algn="r" indent="0" marL="0">
@@ -9027,8 +9027,8 @@
         </p:nvSpPr>
         <p:spPr>
           <a:xfrm>
-            <a:off x="0" y="5762625"/>
-            <a:ext cx="12192000" cy="1095375"/>
+            <a:off x="0" y="0"/>
+            <a:ext cx="12192000" cy="6858000"/>
           </a:xfrm>
           <a:prstGeom prst="rect">
             <a:avLst/>
@@ -9037,7 +9037,7 @@
           <a:ln/>
         </p:spPr>
         <p:txBody>
-          <a:bodyPr wrap="square" lIns="0" tIns="0" rIns="747713" bIns="0" rtlCol="0" anchor="t"/>
+          <a:bodyPr wrap="square" lIns="747713" tIns="0" rIns="747713" bIns="747713" rtlCol="0" anchor="b"/>
           <a:lstStyle/>
           <a:p>
             <a:pPr algn="r" indent="0" marL="0">
@@ -9515,8 +9515,8 @@
         </p:nvSpPr>
         <p:spPr>
           <a:xfrm>
-            <a:off x="0" y="5762625"/>
-            <a:ext cx="12192000" cy="1095375"/>
+            <a:off x="0" y="0"/>
+            <a:ext cx="12192000" cy="6858000"/>
           </a:xfrm>
           <a:prstGeom prst="rect">
             <a:avLst/>
@@ -9525,7 +9525,7 @@
           <a:ln/>
         </p:spPr>
         <p:txBody>
-          <a:bodyPr wrap="square" lIns="0" tIns="0" rIns="747713" bIns="0" rtlCol="0" anchor="t"/>
+          <a:bodyPr wrap="square" lIns="747713" tIns="0" rIns="747713" bIns="747713" rtlCol="0" anchor="b"/>
           <a:lstStyle/>
           <a:p>
             <a:pPr algn="r" indent="0" marL="0">
@@ -9901,8 +9901,8 @@
         </p:nvSpPr>
         <p:spPr>
           <a:xfrm>
-            <a:off x="0" y="5762625"/>
-            <a:ext cx="12192000" cy="1095375"/>
+            <a:off x="0" y="0"/>
+            <a:ext cx="12192000" cy="6858000"/>
           </a:xfrm>
           <a:prstGeom prst="rect">
             <a:avLst/>
@@ -9911,7 +9911,7 @@
           <a:ln/>
         </p:spPr>
         <p:txBody>
-          <a:bodyPr wrap="square" lIns="0" tIns="0" rIns="747713" bIns="0" rtlCol="0" anchor="t"/>
+          <a:bodyPr wrap="square" lIns="747713" tIns="0" rIns="747713" bIns="747713" rtlCol="0" anchor="b"/>
           <a:lstStyle/>
           <a:p>
             <a:pPr algn="r" indent="0" marL="0">
@@ -10227,8 +10227,8 @@
         </p:nvSpPr>
         <p:spPr>
           <a:xfrm>
-            <a:off x="0" y="5762625"/>
-            <a:ext cx="12192000" cy="1095375"/>
+            <a:off x="0" y="0"/>
+            <a:ext cx="12192000" cy="6858000"/>
           </a:xfrm>
           <a:prstGeom prst="rect">
             <a:avLst/>
@@ -10237,7 +10237,7 @@
           <a:ln/>
         </p:spPr>
         <p:txBody>
-          <a:bodyPr wrap="square" lIns="0" tIns="0" rIns="747713" bIns="0" rtlCol="0" anchor="t"/>
+          <a:bodyPr wrap="square" lIns="747713" tIns="0" rIns="747713" bIns="747713" rtlCol="0" anchor="b"/>
           <a:lstStyle/>
           <a:p>
             <a:pPr algn="r" indent="0" marL="0">
@@ -10511,8 +10511,8 @@
         </p:nvSpPr>
         <p:spPr>
           <a:xfrm>
-            <a:off x="0" y="5762625"/>
-            <a:ext cx="12192000" cy="1095375"/>
+            <a:off x="0" y="0"/>
+            <a:ext cx="12192000" cy="6858000"/>
           </a:xfrm>
           <a:prstGeom prst="rect">
             <a:avLst/>
@@ -10521,7 +10521,7 @@
           <a:ln/>
         </p:spPr>
         <p:txBody>
-          <a:bodyPr wrap="square" lIns="0" tIns="0" rIns="747713" bIns="0" rtlCol="0" anchor="t"/>
+          <a:bodyPr wrap="square" lIns="747713" tIns="0" rIns="747713" bIns="747713" rtlCol="0" anchor="b"/>
           <a:lstStyle/>
           <a:p>
             <a:pPr algn="r" indent="0" marL="0">
@@ -10985,8 +10985,8 @@
         </p:nvSpPr>
         <p:spPr>
           <a:xfrm>
-            <a:off x="0" y="5762625"/>
-            <a:ext cx="12192000" cy="1095375"/>
+            <a:off x="0" y="0"/>
+            <a:ext cx="12192000" cy="6858000"/>
           </a:xfrm>
           <a:prstGeom prst="rect">
             <a:avLst/>
@@ -10995,7 +10995,7 @@
           <a:ln/>
         </p:spPr>
         <p:txBody>
-          <a:bodyPr wrap="square" lIns="0" tIns="0" rIns="747713" bIns="0" rtlCol="0" anchor="t"/>
+          <a:bodyPr wrap="square" lIns="747713" tIns="0" rIns="747713" bIns="747713" rtlCol="0" anchor="b"/>
           <a:lstStyle/>
           <a:p>
             <a:pPr algn="r" indent="0" marL="0">
@@ -11227,8 +11227,8 @@
         </p:nvSpPr>
         <p:spPr>
           <a:xfrm>
-            <a:off x="0" y="5762625"/>
-            <a:ext cx="12192000" cy="1095375"/>
+            <a:off x="0" y="0"/>
+            <a:ext cx="12192000" cy="6858000"/>
           </a:xfrm>
           <a:prstGeom prst="rect">
             <a:avLst/>
@@ -11237,7 +11237,7 @@
           <a:ln/>
         </p:spPr>
         <p:txBody>
-          <a:bodyPr wrap="square" lIns="0" tIns="0" rIns="747713" bIns="0" rtlCol="0" anchor="t"/>
+          <a:bodyPr wrap="square" lIns="747713" tIns="0" rIns="747713" bIns="747713" rtlCol="0" anchor="b"/>
           <a:lstStyle/>
           <a:p>
             <a:pPr algn="r" indent="0" marL="0">
@@ -11827,8 +11827,8 @@
         </p:nvSpPr>
         <p:spPr>
           <a:xfrm>
-            <a:off x="0" y="5762625"/>
-            <a:ext cx="12192000" cy="1095375"/>
+            <a:off x="0" y="0"/>
+            <a:ext cx="12192000" cy="6858000"/>
           </a:xfrm>
           <a:prstGeom prst="rect">
             <a:avLst/>
@@ -11837,7 +11837,7 @@
           <a:ln/>
         </p:spPr>
         <p:txBody>
-          <a:bodyPr wrap="square" lIns="0" tIns="0" rIns="747713" bIns="0" rtlCol="0" anchor="t"/>
+          <a:bodyPr wrap="square" lIns="747713" tIns="0" rIns="747713" bIns="747713" rtlCol="0" anchor="b"/>
           <a:lstStyle/>
           <a:p>
             <a:pPr algn="r" indent="0" marL="0">
@@ -12269,8 +12269,8 @@
         </p:nvSpPr>
         <p:spPr>
           <a:xfrm>
-            <a:off x="0" y="5762625"/>
-            <a:ext cx="12192000" cy="1095375"/>
+            <a:off x="0" y="0"/>
+            <a:ext cx="12192000" cy="6858000"/>
           </a:xfrm>
           <a:prstGeom prst="rect">
             <a:avLst/>
@@ -12279,7 +12279,7 @@
           <a:ln/>
         </p:spPr>
         <p:txBody>
-          <a:bodyPr wrap="square" lIns="0" tIns="0" rIns="747713" bIns="0" rtlCol="0" anchor="t"/>
+          <a:bodyPr wrap="square" lIns="747713" tIns="0" rIns="747713" bIns="747713" rtlCol="0" anchor="b"/>
           <a:lstStyle/>
           <a:p>
             <a:pPr algn="r" indent="0" marL="0">
@@ -13982,8 +13982,8 @@
         </p:nvSpPr>
         <p:spPr>
           <a:xfrm>
-            <a:off x="0" y="5762625"/>
-            <a:ext cx="12192000" cy="1095375"/>
+            <a:off x="0" y="0"/>
+            <a:ext cx="12192000" cy="6858000"/>
           </a:xfrm>
           <a:prstGeom prst="rect">
             <a:avLst/>
@@ -13992,7 +13992,7 @@
           <a:ln/>
         </p:spPr>
         <p:txBody>
-          <a:bodyPr wrap="square" lIns="0" tIns="0" rIns="747713" bIns="0" rtlCol="0" anchor="t"/>
+          <a:bodyPr wrap="square" lIns="747713" tIns="0" rIns="747713" bIns="747713" rtlCol="0" anchor="b"/>
           <a:lstStyle/>
           <a:p>
             <a:pPr algn="r" indent="0" marL="0">
@@ -15074,8 +15074,8 @@
         </p:nvSpPr>
         <p:spPr>
           <a:xfrm>
-            <a:off x="0" y="5762625"/>
-            <a:ext cx="12192000" cy="1095375"/>
+            <a:off x="0" y="0"/>
+            <a:ext cx="12192000" cy="6858000"/>
           </a:xfrm>
           <a:prstGeom prst="rect">
             <a:avLst/>
@@ -15084,7 +15084,7 @@
           <a:ln/>
         </p:spPr>
         <p:txBody>
-          <a:bodyPr wrap="square" lIns="0" tIns="0" rIns="747713" bIns="0" rtlCol="0" anchor="t"/>
+          <a:bodyPr wrap="square" lIns="747713" tIns="0" rIns="747713" bIns="747713" rtlCol="0" anchor="b"/>
           <a:lstStyle/>
           <a:p>
             <a:pPr algn="r" indent="0" marL="0">
@@ -15424,8 +15424,8 @@
         </p:nvSpPr>
         <p:spPr>
           <a:xfrm>
-            <a:off x="0" y="5762625"/>
-            <a:ext cx="12192000" cy="1095375"/>
+            <a:off x="0" y="0"/>
+            <a:ext cx="12192000" cy="6858000"/>
           </a:xfrm>
           <a:prstGeom prst="rect">
             <a:avLst/>
@@ -15434,7 +15434,7 @@
           <a:ln/>
         </p:spPr>
         <p:txBody>
-          <a:bodyPr wrap="square" lIns="0" tIns="0" rIns="747713" bIns="0" rtlCol="0" anchor="t"/>
+          <a:bodyPr wrap="square" lIns="747713" tIns="0" rIns="747713" bIns="747713" rtlCol="0" anchor="b"/>
           <a:lstStyle/>
           <a:p>
             <a:pPr algn="r" indent="0" marL="0">
@@ -15785,8 +15785,8 @@
         </p:nvSpPr>
         <p:spPr>
           <a:xfrm>
-            <a:off x="0" y="5762625"/>
-            <a:ext cx="12192000" cy="1095375"/>
+            <a:off x="0" y="0"/>
+            <a:ext cx="12192000" cy="6858000"/>
           </a:xfrm>
           <a:prstGeom prst="rect">
             <a:avLst/>
@@ -15795,7 +15795,7 @@
           <a:ln/>
         </p:spPr>
         <p:txBody>
-          <a:bodyPr wrap="square" lIns="0" tIns="0" rIns="747713" bIns="0" rtlCol="0" anchor="t"/>
+          <a:bodyPr wrap="square" lIns="747713" tIns="0" rIns="747713" bIns="747713" rtlCol="0" anchor="b"/>
           <a:lstStyle/>
           <a:p>
             <a:pPr algn="r" indent="0" marL="0">
@@ -16111,8 +16111,8 @@
         </p:nvSpPr>
         <p:spPr>
           <a:xfrm>
-            <a:off x="0" y="5762625"/>
-            <a:ext cx="12192000" cy="1095375"/>
+            <a:off x="0" y="0"/>
+            <a:ext cx="12192000" cy="6858000"/>
           </a:xfrm>
           <a:prstGeom prst="rect">
             <a:avLst/>
@@ -16121,7 +16121,7 @@
           <a:ln/>
         </p:spPr>
         <p:txBody>
-          <a:bodyPr wrap="square" lIns="0" tIns="0" rIns="747713" bIns="0" rtlCol="0" anchor="t"/>
+          <a:bodyPr wrap="square" lIns="747713" tIns="0" rIns="747713" bIns="747713" rtlCol="0" anchor="b"/>
           <a:lstStyle/>
           <a:p>
             <a:pPr algn="r" indent="0" marL="0">
@@ -16734,8 +16734,8 @@
         </p:nvSpPr>
         <p:spPr>
           <a:xfrm>
-            <a:off x="0" y="5762625"/>
-            <a:ext cx="12192000" cy="1095375"/>
+            <a:off x="0" y="0"/>
+            <a:ext cx="12192000" cy="6858000"/>
           </a:xfrm>
           <a:prstGeom prst="rect">
             <a:avLst/>
@@ -16744,7 +16744,7 @@
           <a:ln/>
         </p:spPr>
         <p:txBody>
-          <a:bodyPr wrap="square" lIns="0" tIns="0" rIns="747713" bIns="0" rtlCol="0" anchor="t"/>
+          <a:bodyPr wrap="square" lIns="747713" tIns="0" rIns="747713" bIns="747713" rtlCol="0" anchor="b"/>
           <a:lstStyle/>
           <a:p>
             <a:pPr algn="r" indent="0" marL="0">
@@ -17390,8 +17390,8 @@
         </p:nvSpPr>
         <p:spPr>
           <a:xfrm>
-            <a:off x="0" y="5762625"/>
-            <a:ext cx="12192000" cy="1095375"/>
+            <a:off x="0" y="0"/>
+            <a:ext cx="12192000" cy="6858000"/>
           </a:xfrm>
           <a:prstGeom prst="rect">
             <a:avLst/>
@@ -17400,7 +17400,7 @@
           <a:ln/>
         </p:spPr>
         <p:txBody>
-          <a:bodyPr wrap="square" lIns="0" tIns="0" rIns="747713" bIns="0" rtlCol="0" anchor="t"/>
+          <a:bodyPr wrap="square" lIns="747713" tIns="0" rIns="747713" bIns="747713" rtlCol="0" anchor="b"/>
           <a:lstStyle/>
           <a:p>
             <a:pPr algn="r" indent="0" marL="0">
@@ -17620,8 +17620,8 @@
         </p:nvSpPr>
         <p:spPr>
           <a:xfrm>
-            <a:off x="0" y="5762625"/>
-            <a:ext cx="12192000" cy="1095375"/>
+            <a:off x="0" y="0"/>
+            <a:ext cx="12192000" cy="6858000"/>
           </a:xfrm>
           <a:prstGeom prst="rect">
             <a:avLst/>
@@ -17630,7 +17630,7 @@
           <a:ln/>
         </p:spPr>
         <p:txBody>
-          <a:bodyPr wrap="square" lIns="0" tIns="0" rIns="747713" bIns="0" rtlCol="0" anchor="t"/>
+          <a:bodyPr wrap="square" lIns="747713" tIns="0" rIns="747713" bIns="747713" rtlCol="0" anchor="b"/>
           <a:lstStyle/>
           <a:p>
             <a:pPr algn="r" indent="0" marL="0">
@@ -18753,8 +18753,8 @@
         </p:nvSpPr>
         <p:spPr>
           <a:xfrm>
-            <a:off x="0" y="5762625"/>
-            <a:ext cx="12192000" cy="1095375"/>
+            <a:off x="0" y="0"/>
+            <a:ext cx="12192000" cy="6858000"/>
           </a:xfrm>
           <a:prstGeom prst="rect">
             <a:avLst/>
@@ -18763,7 +18763,7 @@
           <a:ln/>
         </p:spPr>
         <p:txBody>
-          <a:bodyPr wrap="square" lIns="0" tIns="0" rIns="747713" bIns="0" rtlCol="0" anchor="t"/>
+          <a:bodyPr wrap="square" lIns="747713" tIns="0" rIns="747713" bIns="747713" rtlCol="0" anchor="b"/>
           <a:lstStyle/>
           <a:p>
             <a:pPr algn="r" indent="0" marL="0">
@@ -19965,8 +19965,8 @@
         </p:nvSpPr>
         <p:spPr>
           <a:xfrm>
-            <a:off x="0" y="5762625"/>
-            <a:ext cx="12192000" cy="1095375"/>
+            <a:off x="0" y="0"/>
+            <a:ext cx="12192000" cy="6858000"/>
           </a:xfrm>
           <a:prstGeom prst="rect">
             <a:avLst/>
@@ -19975,7 +19975,7 @@
           <a:ln/>
         </p:spPr>
         <p:txBody>
-          <a:bodyPr wrap="square" lIns="0" tIns="0" rIns="747713" bIns="0" rtlCol="0" anchor="t"/>
+          <a:bodyPr wrap="square" lIns="747713" tIns="0" rIns="747713" bIns="747713" rtlCol="0" anchor="b"/>
           <a:lstStyle/>
           <a:p>
             <a:pPr algn="r" indent="0" marL="0">
@@ -20954,8 +20954,8 @@
         </p:nvSpPr>
         <p:spPr>
           <a:xfrm>
-            <a:off x="0" y="5762625"/>
-            <a:ext cx="12192000" cy="1095375"/>
+            <a:off x="0" y="0"/>
+            <a:ext cx="12192000" cy="6858000"/>
           </a:xfrm>
           <a:prstGeom prst="rect">
             <a:avLst/>
@@ -20964,7 +20964,7 @@
           <a:ln/>
         </p:spPr>
         <p:txBody>
-          <a:bodyPr wrap="square" lIns="0" tIns="0" rIns="747713" bIns="0" rtlCol="0" anchor="t"/>
+          <a:bodyPr wrap="square" lIns="747713" tIns="0" rIns="747713" bIns="747713" rtlCol="0" anchor="b"/>
           <a:lstStyle/>
           <a:p>
             <a:pPr algn="r" indent="0" marL="0">
@@ -21145,8 +21145,8 @@
         </p:nvSpPr>
         <p:spPr>
           <a:xfrm>
-            <a:off x="0" y="5762625"/>
-            <a:ext cx="12192000" cy="1095375"/>
+            <a:off x="0" y="0"/>
+            <a:ext cx="12192000" cy="6858000"/>
           </a:xfrm>
           <a:prstGeom prst="rect">
             <a:avLst/>
@@ -21155,7 +21155,7 @@
           <a:ln/>
         </p:spPr>
         <p:txBody>
-          <a:bodyPr wrap="square" lIns="0" tIns="0" rIns="747713" bIns="0" rtlCol="0" anchor="t"/>
+          <a:bodyPr wrap="square" lIns="747713" tIns="0" rIns="747713" bIns="747713" rtlCol="0" anchor="b"/>
           <a:lstStyle/>
           <a:p>
             <a:pPr algn="r" indent="0" marL="0">
@@ -21644,8 +21644,8 @@
         </p:nvSpPr>
         <p:spPr>
           <a:xfrm>
-            <a:off x="0" y="5762625"/>
-            <a:ext cx="12192000" cy="1095375"/>
+            <a:off x="0" y="0"/>
+            <a:ext cx="12192000" cy="6858000"/>
           </a:xfrm>
           <a:prstGeom prst="rect">
             <a:avLst/>
@@ -21654,7 +21654,7 @@
           <a:ln/>
         </p:spPr>
         <p:txBody>
-          <a:bodyPr wrap="square" lIns="0" tIns="0" rIns="747713" bIns="0" rtlCol="0" anchor="t"/>
+          <a:bodyPr wrap="square" lIns="747713" tIns="0" rIns="747713" bIns="747713" rtlCol="0" anchor="b"/>
           <a:lstStyle/>
           <a:p>
             <a:pPr algn="r" indent="0" marL="0">
@@ -21784,8 +21784,8 @@
         </p:nvSpPr>
         <p:spPr>
           <a:xfrm>
-            <a:off x="0" y="5762625"/>
-            <a:ext cx="12192000" cy="1095375"/>
+            <a:off x="0" y="0"/>
+            <a:ext cx="12192000" cy="6858000"/>
           </a:xfrm>
           <a:prstGeom prst="rect">
             <a:avLst/>
@@ -21794,7 +21794,7 @@
           <a:ln/>
         </p:spPr>
         <p:txBody>
-          <a:bodyPr wrap="square" lIns="0" tIns="0" rIns="747713" bIns="0" rtlCol="0" anchor="t"/>
+          <a:bodyPr wrap="square" lIns="747713" tIns="0" rIns="747713" bIns="747713" rtlCol="0" anchor="b"/>
           <a:lstStyle/>
           <a:p>
             <a:pPr algn="r" indent="0" marL="0">
@@ -21930,8 +21930,8 @@
         </p:nvSpPr>
         <p:spPr>
           <a:xfrm>
-            <a:off x="0" y="5762625"/>
-            <a:ext cx="12192000" cy="1095375"/>
+            <a:off x="0" y="0"/>
+            <a:ext cx="12192000" cy="6858000"/>
           </a:xfrm>
           <a:prstGeom prst="rect">
             <a:avLst/>
@@ -21940,7 +21940,7 @@
           <a:ln/>
         </p:spPr>
         <p:txBody>
-          <a:bodyPr wrap="square" lIns="0" tIns="0" rIns="747713" bIns="0" rtlCol="0" anchor="t"/>
+          <a:bodyPr wrap="square" lIns="747713" tIns="0" rIns="747713" bIns="747713" rtlCol="0" anchor="b"/>
           <a:lstStyle/>
           <a:p>
             <a:pPr algn="r" indent="0" marL="0">
@@ -22184,8 +22184,8 @@
         </p:nvSpPr>
         <p:spPr>
           <a:xfrm>
-            <a:off x="0" y="5762625"/>
-            <a:ext cx="12192000" cy="1095375"/>
+            <a:off x="0" y="0"/>
+            <a:ext cx="12192000" cy="6858000"/>
           </a:xfrm>
           <a:prstGeom prst="rect">
             <a:avLst/>
@@ -22194,7 +22194,7 @@
           <a:ln/>
         </p:spPr>
         <p:txBody>
-          <a:bodyPr wrap="square" lIns="0" tIns="0" rIns="747713" bIns="0" rtlCol="0" anchor="t"/>
+          <a:bodyPr wrap="square" lIns="747713" tIns="0" rIns="747713" bIns="747713" rtlCol="0" anchor="b"/>
           <a:lstStyle/>
           <a:p>
             <a:pPr algn="r" indent="0" marL="0">
@@ -23098,8 +23098,8 @@
         </p:nvSpPr>
         <p:spPr>
           <a:xfrm>
-            <a:off x="0" y="5762625"/>
-            <a:ext cx="12192000" cy="1095375"/>
+            <a:off x="0" y="0"/>
+            <a:ext cx="12192000" cy="6858000"/>
           </a:xfrm>
           <a:prstGeom prst="rect">
             <a:avLst/>
@@ -23108,7 +23108,7 @@
           <a:ln/>
         </p:spPr>
         <p:txBody>
-          <a:bodyPr wrap="square" lIns="0" tIns="0" rIns="747713" bIns="0" rtlCol="0" anchor="t"/>
+          <a:bodyPr wrap="square" lIns="747713" tIns="0" rIns="747713" bIns="747713" rtlCol="0" anchor="b"/>
           <a:lstStyle/>
           <a:p>
             <a:pPr algn="r" indent="0" marL="0">
@@ -23507,48 +23507,6 @@
           </a:p>
         </p:txBody>
       </p:sp>
-      <p:sp>
-        <p:nvSpPr>
-          <p:cNvPr id="8" name="Text 6"/>
-          <p:cNvSpPr/>
-          <p:nvPr/>
-        </p:nvSpPr>
-        <p:spPr>
-          <a:xfrm>
-            <a:off x="0" y="5762625"/>
-            <a:ext cx="12192000" cy="1095375"/>
-          </a:xfrm>
-          <a:prstGeom prst="rect">
-            <a:avLst/>
-          </a:prstGeom>
-          <a:noFill/>
-          <a:ln/>
-        </p:spPr>
-        <p:txBody>
-          <a:bodyPr wrap="square" lIns="0" tIns="0" rIns="747713" bIns="0" rtlCol="0" anchor="t"/>
-          <a:lstStyle/>
-          <a:p>
-            <a:pPr algn="r" indent="0" marL="0">
-              <a:lnSpc>
-                <a:spcPct val="150000"/>
-              </a:lnSpc>
-              <a:buNone/>
-            </a:pPr>
-            <a:r>
-              <a:rPr lang="en-US" sz="1800" dirty="0">
-                <a:solidFill>
-                  <a:srgbClr val="777777"/>
-                </a:solidFill>
-                <a:latin typeface="Segoe UI" pitchFamily="34" charset="0"/>
-                <a:ea typeface="Segoe UI" pitchFamily="34" charset="-122"/>
-                <a:cs typeface="Segoe UI" pitchFamily="34" charset="-120"/>
-              </a:rPr>
-              <a:t>40</a:t>
-            </a:r>
-            <a:endParaRPr lang="en-US" sz="1800" dirty="0"/>
-          </a:p>
-        </p:txBody>
-      </p:sp>
     </p:spTree>
   </p:cSld>
   <p:clrMapOvr>
@@ -23906,8 +23864,8 @@
         </p:nvSpPr>
         <p:spPr>
           <a:xfrm>
-            <a:off x="0" y="5762625"/>
-            <a:ext cx="12192000" cy="1095375"/>
+            <a:off x="0" y="0"/>
+            <a:ext cx="12192000" cy="6858000"/>
           </a:xfrm>
           <a:prstGeom prst="rect">
             <a:avLst/>
@@ -23916,7 +23874,7 @@
           <a:ln/>
         </p:spPr>
         <p:txBody>
-          <a:bodyPr wrap="square" lIns="0" tIns="0" rIns="747713" bIns="0" rtlCol="0" anchor="t"/>
+          <a:bodyPr wrap="square" lIns="747713" tIns="0" rIns="747713" bIns="747713" rtlCol="0" anchor="b"/>
           <a:lstStyle/>
           <a:p>
             <a:pPr algn="r" indent="0" marL="0">
@@ -24200,8 +24158,8 @@
         </p:nvSpPr>
         <p:spPr>
           <a:xfrm>
-            <a:off x="0" y="5762625"/>
-            <a:ext cx="12192000" cy="1095375"/>
+            <a:off x="0" y="0"/>
+            <a:ext cx="12192000" cy="6858000"/>
           </a:xfrm>
           <a:prstGeom prst="rect">
             <a:avLst/>
@@ -24210,7 +24168,7 @@
           <a:ln/>
         </p:spPr>
         <p:txBody>
-          <a:bodyPr wrap="square" lIns="0" tIns="0" rIns="747713" bIns="0" rtlCol="0" anchor="t"/>
+          <a:bodyPr wrap="square" lIns="747713" tIns="0" rIns="747713" bIns="747713" rtlCol="0" anchor="b"/>
           <a:lstStyle/>
           <a:p>
             <a:pPr algn="r" indent="0" marL="0">
@@ -24693,8 +24651,8 @@
         </p:nvSpPr>
         <p:spPr>
           <a:xfrm>
-            <a:off x="0" y="5762625"/>
-            <a:ext cx="12192000" cy="1095375"/>
+            <a:off x="0" y="0"/>
+            <a:ext cx="12192000" cy="6858000"/>
           </a:xfrm>
           <a:prstGeom prst="rect">
             <a:avLst/>
@@ -24703,7 +24661,7 @@
           <a:ln/>
         </p:spPr>
         <p:txBody>
-          <a:bodyPr wrap="square" lIns="0" tIns="0" rIns="747713" bIns="0" rtlCol="0" anchor="t"/>
+          <a:bodyPr wrap="square" lIns="747713" tIns="0" rIns="747713" bIns="747713" rtlCol="0" anchor="b"/>
           <a:lstStyle/>
           <a:p>
             <a:pPr algn="r" indent="0" marL="0">
@@ -26494,8 +26452,8 @@
         </p:nvSpPr>
         <p:spPr>
           <a:xfrm>
-            <a:off x="0" y="5762625"/>
-            <a:ext cx="12192000" cy="1095375"/>
+            <a:off x="0" y="0"/>
+            <a:ext cx="12192000" cy="6858000"/>
           </a:xfrm>
           <a:prstGeom prst="rect">
             <a:avLst/>
@@ -26504,7 +26462,7 @@
           <a:ln/>
         </p:spPr>
         <p:txBody>
-          <a:bodyPr wrap="square" lIns="0" tIns="0" rIns="747713" bIns="0" rtlCol="0" anchor="t"/>
+          <a:bodyPr wrap="square" lIns="747713" tIns="0" rIns="747713" bIns="747713" rtlCol="0" anchor="b"/>
           <a:lstStyle/>
           <a:p>
             <a:pPr algn="r" indent="0" marL="0">
@@ -27009,8 +26967,8 @@
         </p:nvSpPr>
         <p:spPr>
           <a:xfrm>
-            <a:off x="0" y="5762625"/>
-            <a:ext cx="12192000" cy="1095375"/>
+            <a:off x="0" y="0"/>
+            <a:ext cx="12192000" cy="6858000"/>
           </a:xfrm>
           <a:prstGeom prst="rect">
             <a:avLst/>
@@ -27019,7 +26977,7 @@
           <a:ln/>
         </p:spPr>
         <p:txBody>
-          <a:bodyPr wrap="square" lIns="0" tIns="0" rIns="747713" bIns="0" rtlCol="0" anchor="t"/>
+          <a:bodyPr wrap="square" lIns="747713" tIns="0" rIns="747713" bIns="747713" rtlCol="0" anchor="b"/>
           <a:lstStyle/>
           <a:p>
             <a:pPr algn="r" indent="0" marL="0">
@@ -27543,8 +27501,8 @@
         </p:nvSpPr>
         <p:spPr>
           <a:xfrm>
-            <a:off x="0" y="5762625"/>
-            <a:ext cx="12192000" cy="1095375"/>
+            <a:off x="0" y="0"/>
+            <a:ext cx="12192000" cy="6858000"/>
           </a:xfrm>
           <a:prstGeom prst="rect">
             <a:avLst/>
@@ -27553,7 +27511,7 @@
           <a:ln/>
         </p:spPr>
         <p:txBody>
-          <a:bodyPr wrap="square" lIns="0" tIns="0" rIns="747713" bIns="0" rtlCol="0" anchor="t"/>
+          <a:bodyPr wrap="square" lIns="747713" tIns="0" rIns="747713" bIns="747713" rtlCol="0" anchor="b"/>
           <a:lstStyle/>
           <a:p>
             <a:pPr algn="r" indent="0" marL="0">
@@ -28014,8 +27972,8 @@
         </p:nvSpPr>
         <p:spPr>
           <a:xfrm>
-            <a:off x="0" y="5762625"/>
-            <a:ext cx="12192000" cy="1095375"/>
+            <a:off x="0" y="0"/>
+            <a:ext cx="12192000" cy="6858000"/>
           </a:xfrm>
           <a:prstGeom prst="rect">
             <a:avLst/>
@@ -28024,7 +27982,7 @@
           <a:ln/>
         </p:spPr>
         <p:txBody>
-          <a:bodyPr wrap="square" lIns="0" tIns="0" rIns="747713" bIns="0" rtlCol="0" anchor="t"/>
+          <a:bodyPr wrap="square" lIns="747713" tIns="0" rIns="747713" bIns="747713" rtlCol="0" anchor="b"/>
           <a:lstStyle/>
           <a:p>
             <a:pPr algn="r" indent="0" marL="0">
@@ -28521,8 +28479,8 @@
         </p:nvSpPr>
         <p:spPr>
           <a:xfrm>
-            <a:off x="0" y="5762625"/>
-            <a:ext cx="12192000" cy="1095375"/>
+            <a:off x="0" y="0"/>
+            <a:ext cx="12192000" cy="6858000"/>
           </a:xfrm>
           <a:prstGeom prst="rect">
             <a:avLst/>
@@ -28531,7 +28489,7 @@
           <a:ln/>
         </p:spPr>
         <p:txBody>
-          <a:bodyPr wrap="square" lIns="0" tIns="0" rIns="747713" bIns="0" rtlCol="0" anchor="t"/>
+          <a:bodyPr wrap="square" lIns="747713" tIns="0" rIns="747713" bIns="747713" rtlCol="0" anchor="b"/>
           <a:lstStyle/>
           <a:p>
             <a:pPr algn="r" indent="0" marL="0">
@@ -29521,8 +29479,8 @@
         </p:nvSpPr>
         <p:spPr>
           <a:xfrm>
-            <a:off x="0" y="5762625"/>
-            <a:ext cx="12192000" cy="1095375"/>
+            <a:off x="0" y="0"/>
+            <a:ext cx="12192000" cy="6858000"/>
           </a:xfrm>
           <a:prstGeom prst="rect">
             <a:avLst/>
@@ -29531,7 +29489,7 @@
           <a:ln/>
         </p:spPr>
         <p:txBody>
-          <a:bodyPr wrap="square" lIns="0" tIns="0" rIns="747713" bIns="0" rtlCol="0" anchor="t"/>
+          <a:bodyPr wrap="square" lIns="747713" tIns="0" rIns="747713" bIns="747713" rtlCol="0" anchor="b"/>
           <a:lstStyle/>
           <a:p>
             <a:pPr algn="r" indent="0" marL="0">
@@ -30073,8 +30031,8 @@
         </p:nvSpPr>
         <p:spPr>
           <a:xfrm>
-            <a:off x="0" y="5762625"/>
-            <a:ext cx="12192000" cy="1095375"/>
+            <a:off x="0" y="0"/>
+            <a:ext cx="12192000" cy="6858000"/>
           </a:xfrm>
           <a:prstGeom prst="rect">
             <a:avLst/>
@@ -30083,7 +30041,7 @@
           <a:ln/>
         </p:spPr>
         <p:txBody>
-          <a:bodyPr wrap="square" lIns="0" tIns="0" rIns="747713" bIns="0" rtlCol="0" anchor="t"/>
+          <a:bodyPr wrap="square" lIns="747713" tIns="0" rIns="747713" bIns="747713" rtlCol="0" anchor="b"/>
           <a:lstStyle/>
           <a:p>
             <a:pPr algn="r" indent="0" marL="0">
@@ -30297,8 +30255,8 @@
         </p:nvSpPr>
         <p:spPr>
           <a:xfrm>
-            <a:off x="0" y="5762625"/>
-            <a:ext cx="12192000" cy="1095375"/>
+            <a:off x="0" y="0"/>
+            <a:ext cx="12192000" cy="6858000"/>
           </a:xfrm>
           <a:prstGeom prst="rect">
             <a:avLst/>
@@ -30307,7 +30265,7 @@
           <a:ln/>
         </p:spPr>
         <p:txBody>
-          <a:bodyPr wrap="square" lIns="0" tIns="0" rIns="747713" bIns="0" rtlCol="0" anchor="t"/>
+          <a:bodyPr wrap="square" lIns="747713" tIns="0" rIns="747713" bIns="747713" rtlCol="0" anchor="b"/>
           <a:lstStyle/>
           <a:p>
             <a:pPr algn="r" indent="0" marL="0">
@@ -30584,8 +30542,8 @@
         </p:nvSpPr>
         <p:spPr>
           <a:xfrm>
-            <a:off x="0" y="5762625"/>
-            <a:ext cx="8534400" cy="1095375"/>
+            <a:off x="0" y="0"/>
+            <a:ext cx="8534400" cy="6858000"/>
           </a:xfrm>
           <a:prstGeom prst="rect">
             <a:avLst/>
@@ -30594,7 +30552,7 @@
           <a:ln/>
         </p:spPr>
         <p:txBody>
-          <a:bodyPr wrap="square" lIns="0" tIns="0" rIns="747713" bIns="0" rtlCol="0" anchor="t"/>
+          <a:bodyPr wrap="square" lIns="747713" tIns="0" rIns="747713" bIns="747713" rtlCol="0" anchor="b"/>
           <a:lstStyle/>
           <a:p>
             <a:pPr algn="r" indent="0" marL="0">
@@ -30945,48 +30903,6 @@
           </a:prstGeom>
         </p:spPr>
       </p:pic>
-      <p:sp>
-        <p:nvSpPr>
-          <p:cNvPr id="10" name="Text 7"/>
-          <p:cNvSpPr/>
-          <p:nvPr/>
-        </p:nvSpPr>
-        <p:spPr>
-          <a:xfrm>
-            <a:off x="0" y="5762625"/>
-            <a:ext cx="12192000" cy="1095375"/>
-          </a:xfrm>
-          <a:prstGeom prst="rect">
-            <a:avLst/>
-          </a:prstGeom>
-          <a:noFill/>
-          <a:ln/>
-        </p:spPr>
-        <p:txBody>
-          <a:bodyPr wrap="square" lIns="0" tIns="0" rIns="747713" bIns="0" rtlCol="0" anchor="t"/>
-          <a:lstStyle/>
-          <a:p>
-            <a:pPr algn="r" indent="0" marL="0">
-              <a:lnSpc>
-                <a:spcPct val="150000"/>
-              </a:lnSpc>
-              <a:buNone/>
-            </a:pPr>
-            <a:r>
-              <a:rPr lang="en-US" sz="1800" dirty="0">
-                <a:solidFill>
-                  <a:srgbClr val="777777"/>
-                </a:solidFill>
-                <a:latin typeface="Segoe UI" pitchFamily="34" charset="0"/>
-                <a:ea typeface="Segoe UI" pitchFamily="34" charset="-122"/>
-                <a:cs typeface="Segoe UI" pitchFamily="34" charset="-120"/>
-              </a:rPr>
-              <a:t>52</a:t>
-            </a:r>
-            <a:endParaRPr lang="en-US" sz="1800" dirty="0"/>
-          </a:p>
-        </p:txBody>
-      </p:sp>
     </p:spTree>
   </p:cSld>
   <p:clrMapOvr>
@@ -31177,8 +31093,8 @@
         </p:nvSpPr>
         <p:spPr>
           <a:xfrm>
-            <a:off x="0" y="5762625"/>
-            <a:ext cx="12192000" cy="1095375"/>
+            <a:off x="0" y="0"/>
+            <a:ext cx="12192000" cy="6858000"/>
           </a:xfrm>
           <a:prstGeom prst="rect">
             <a:avLst/>
@@ -31187,7 +31103,7 @@
           <a:ln/>
         </p:spPr>
         <p:txBody>
-          <a:bodyPr wrap="square" lIns="0" tIns="0" rIns="747713" bIns="0" rtlCol="0" anchor="t"/>
+          <a:bodyPr wrap="square" lIns="747713" tIns="0" rIns="747713" bIns="747713" rtlCol="0" anchor="b"/>
           <a:lstStyle/>
           <a:p>
             <a:pPr algn="r" indent="0" marL="0">
@@ -31611,8 +31527,8 @@
         </p:nvSpPr>
         <p:spPr>
           <a:xfrm>
-            <a:off x="0" y="5762625"/>
-            <a:ext cx="12192000" cy="1095375"/>
+            <a:off x="0" y="0"/>
+            <a:ext cx="12192000" cy="6858000"/>
           </a:xfrm>
           <a:prstGeom prst="rect">
             <a:avLst/>
@@ -31621,7 +31537,7 @@
           <a:ln/>
         </p:spPr>
         <p:txBody>
-          <a:bodyPr wrap="square" lIns="0" tIns="0" rIns="747713" bIns="0" rtlCol="0" anchor="t"/>
+          <a:bodyPr wrap="square" lIns="747713" tIns="0" rIns="747713" bIns="747713" rtlCol="0" anchor="b"/>
           <a:lstStyle/>
           <a:p>
             <a:pPr algn="r" indent="0" marL="0">
@@ -31891,48 +31807,6 @@
           </a:p>
         </p:txBody>
       </p:sp>
-      <p:sp>
-        <p:nvSpPr>
-          <p:cNvPr id="6" name="Text 4"/>
-          <p:cNvSpPr/>
-          <p:nvPr/>
-        </p:nvSpPr>
-        <p:spPr>
-          <a:xfrm>
-            <a:off x="0" y="5762625"/>
-            <a:ext cx="12192000" cy="1095375"/>
-          </a:xfrm>
-          <a:prstGeom prst="rect">
-            <a:avLst/>
-          </a:prstGeom>
-          <a:noFill/>
-          <a:ln/>
-        </p:spPr>
-        <p:txBody>
-          <a:bodyPr wrap="square" lIns="0" tIns="0" rIns="747713" bIns="0" rtlCol="0" anchor="t"/>
-          <a:lstStyle/>
-          <a:p>
-            <a:pPr algn="r" indent="0" marL="0">
-              <a:lnSpc>
-                <a:spcPct val="150000"/>
-              </a:lnSpc>
-              <a:buNone/>
-            </a:pPr>
-            <a:r>
-              <a:rPr lang="en-US" sz="1800" dirty="0">
-                <a:solidFill>
-                  <a:srgbClr val="777777"/>
-                </a:solidFill>
-                <a:latin typeface="Segoe UI" pitchFamily="34" charset="0"/>
-                <a:ea typeface="Segoe UI" pitchFamily="34" charset="-122"/>
-                <a:cs typeface="Segoe UI" pitchFamily="34" charset="-120"/>
-              </a:rPr>
-              <a:t>55</a:t>
-            </a:r>
-            <a:endParaRPr lang="en-US" sz="1800" dirty="0"/>
-          </a:p>
-        </p:txBody>
-      </p:sp>
     </p:spTree>
   </p:cSld>
   <p:clrMapOvr>
@@ -32420,8 +32294,8 @@
         </p:nvSpPr>
         <p:spPr>
           <a:xfrm>
-            <a:off x="0" y="5762625"/>
-            <a:ext cx="12192000" cy="1095375"/>
+            <a:off x="0" y="0"/>
+            <a:ext cx="12192000" cy="6858000"/>
           </a:xfrm>
           <a:prstGeom prst="rect">
             <a:avLst/>
@@ -32430,7 +32304,7 @@
           <a:ln/>
         </p:spPr>
         <p:txBody>
-          <a:bodyPr wrap="square" lIns="0" tIns="0" rIns="747713" bIns="0" rtlCol="0" anchor="t"/>
+          <a:bodyPr wrap="square" lIns="747713" tIns="0" rIns="747713" bIns="747713" rtlCol="0" anchor="b"/>
           <a:lstStyle/>
           <a:p>
             <a:pPr algn="r" indent="0" marL="0">
@@ -33410,8 +33284,8 @@
         </p:nvSpPr>
         <p:spPr>
           <a:xfrm>
-            <a:off x="0" y="5762625"/>
-            <a:ext cx="12192000" cy="1095375"/>
+            <a:off x="0" y="0"/>
+            <a:ext cx="12192000" cy="6858000"/>
           </a:xfrm>
           <a:prstGeom prst="rect">
             <a:avLst/>
@@ -33420,7 +33294,7 @@
           <a:ln/>
         </p:spPr>
         <p:txBody>
-          <a:bodyPr wrap="square" lIns="0" tIns="0" rIns="747713" bIns="0" rtlCol="0" anchor="t"/>
+          <a:bodyPr wrap="square" lIns="747713" tIns="0" rIns="747713" bIns="747713" rtlCol="0" anchor="b"/>
           <a:lstStyle/>
           <a:p>
             <a:pPr algn="r" indent="0" marL="0">
@@ -33907,8 +33781,8 @@
         </p:nvSpPr>
         <p:spPr>
           <a:xfrm>
-            <a:off x="0" y="5762625"/>
-            <a:ext cx="12192000" cy="1095375"/>
+            <a:off x="0" y="0"/>
+            <a:ext cx="12192000" cy="6858000"/>
           </a:xfrm>
           <a:prstGeom prst="rect">
             <a:avLst/>
@@ -33917,7 +33791,7 @@
           <a:ln/>
         </p:spPr>
         <p:txBody>
-          <a:bodyPr wrap="square" lIns="0" tIns="0" rIns="747713" bIns="0" rtlCol="0" anchor="t"/>
+          <a:bodyPr wrap="square" lIns="747713" tIns="0" rIns="747713" bIns="747713" rtlCol="0" anchor="b"/>
           <a:lstStyle/>
           <a:p>
             <a:pPr algn="r" indent="0" marL="0">
@@ -34165,8 +34039,8 @@
         </p:nvSpPr>
         <p:spPr>
           <a:xfrm>
-            <a:off x="0" y="5762625"/>
-            <a:ext cx="12192000" cy="1095375"/>
+            <a:off x="0" y="0"/>
+            <a:ext cx="12192000" cy="6858000"/>
           </a:xfrm>
           <a:prstGeom prst="rect">
             <a:avLst/>
@@ -34175,7 +34049,7 @@
           <a:ln/>
         </p:spPr>
         <p:txBody>
-          <a:bodyPr wrap="square" lIns="0" tIns="0" rIns="747713" bIns="0" rtlCol="0" anchor="t"/>
+          <a:bodyPr wrap="square" lIns="747713" tIns="0" rIns="747713" bIns="747713" rtlCol="0" anchor="b"/>
           <a:lstStyle/>
           <a:p>
             <a:pPr algn="r" indent="0" marL="0">
@@ -34694,8 +34568,8 @@
         </p:nvSpPr>
         <p:spPr>
           <a:xfrm>
-            <a:off x="0" y="5762625"/>
-            <a:ext cx="12192000" cy="1095375"/>
+            <a:off x="0" y="0"/>
+            <a:ext cx="12192000" cy="6858000"/>
           </a:xfrm>
           <a:prstGeom prst="rect">
             <a:avLst/>
@@ -34704,7 +34578,7 @@
           <a:ln/>
         </p:spPr>
         <p:txBody>
-          <a:bodyPr wrap="square" lIns="0" tIns="0" rIns="747713" bIns="0" rtlCol="0" anchor="t"/>
+          <a:bodyPr wrap="square" lIns="747713" tIns="0" rIns="747713" bIns="747713" rtlCol="0" anchor="b"/>
           <a:lstStyle/>
           <a:p>
             <a:pPr algn="r" indent="0" marL="0">
@@ -35187,48 +35061,6 @@
           </a:p>
         </p:txBody>
       </p:sp>
-      <p:sp>
-        <p:nvSpPr>
-          <p:cNvPr id="8" name="Text 6"/>
-          <p:cNvSpPr/>
-          <p:nvPr/>
-        </p:nvSpPr>
-        <p:spPr>
-          <a:xfrm>
-            <a:off x="0" y="5762625"/>
-            <a:ext cx="12192000" cy="1095375"/>
-          </a:xfrm>
-          <a:prstGeom prst="rect">
-            <a:avLst/>
-          </a:prstGeom>
-          <a:noFill/>
-          <a:ln/>
-        </p:spPr>
-        <p:txBody>
-          <a:bodyPr wrap="square" lIns="0" tIns="0" rIns="747713" bIns="0" rtlCol="0" anchor="t"/>
-          <a:lstStyle/>
-          <a:p>
-            <a:pPr algn="r" indent="0" marL="0">
-              <a:lnSpc>
-                <a:spcPct val="150000"/>
-              </a:lnSpc>
-              <a:buNone/>
-            </a:pPr>
-            <a:r>
-              <a:rPr lang="en-US" sz="1800" dirty="0">
-                <a:solidFill>
-                  <a:srgbClr val="777777"/>
-                </a:solidFill>
-                <a:latin typeface="Segoe UI" pitchFamily="34" charset="0"/>
-                <a:ea typeface="Segoe UI" pitchFamily="34" charset="-122"/>
-                <a:cs typeface="Segoe UI" pitchFamily="34" charset="-120"/>
-              </a:rPr>
-              <a:t>60</a:t>
-            </a:r>
-            <a:endParaRPr lang="en-US" sz="1800" dirty="0"/>
-          </a:p>
-        </p:txBody>
-      </p:sp>
     </p:spTree>
   </p:cSld>
   <p:clrMapOvr>
@@ -35947,8 +35779,8 @@
         </p:nvSpPr>
         <p:spPr>
           <a:xfrm>
-            <a:off x="0" y="5762625"/>
-            <a:ext cx="12192000" cy="1095375"/>
+            <a:off x="0" y="0"/>
+            <a:ext cx="12192000" cy="6858000"/>
           </a:xfrm>
           <a:prstGeom prst="rect">
             <a:avLst/>
@@ -35957,7 +35789,7 @@
           <a:ln/>
         </p:spPr>
         <p:txBody>
-          <a:bodyPr wrap="square" lIns="0" tIns="0" rIns="747713" bIns="0" rtlCol="0" anchor="t"/>
+          <a:bodyPr wrap="square" lIns="747713" tIns="0" rIns="747713" bIns="747713" rtlCol="0" anchor="b"/>
           <a:lstStyle/>
           <a:p>
             <a:pPr algn="r" indent="0" marL="0">
@@ -36190,8 +36022,8 @@
         </p:nvSpPr>
         <p:spPr>
           <a:xfrm>
-            <a:off x="0" y="5762625"/>
-            <a:ext cx="12192000" cy="1095375"/>
+            <a:off x="0" y="0"/>
+            <a:ext cx="12192000" cy="6858000"/>
           </a:xfrm>
           <a:prstGeom prst="rect">
             <a:avLst/>
@@ -36200,7 +36032,7 @@
           <a:ln/>
         </p:spPr>
         <p:txBody>
-          <a:bodyPr wrap="square" lIns="0" tIns="0" rIns="747713" bIns="0" rtlCol="0" anchor="t"/>
+          <a:bodyPr wrap="square" lIns="747713" tIns="0" rIns="747713" bIns="747713" rtlCol="0" anchor="b"/>
           <a:lstStyle/>
           <a:p>
             <a:pPr algn="r" indent="0" marL="0">
@@ -36416,8 +36248,8 @@
         </p:nvSpPr>
         <p:spPr>
           <a:xfrm>
-            <a:off x="0" y="5762625"/>
-            <a:ext cx="12192000" cy="1095375"/>
+            <a:off x="0" y="0"/>
+            <a:ext cx="12192000" cy="6858000"/>
           </a:xfrm>
           <a:prstGeom prst="rect">
             <a:avLst/>
@@ -36426,7 +36258,7 @@
           <a:ln/>
         </p:spPr>
         <p:txBody>
-          <a:bodyPr wrap="square" lIns="0" tIns="0" rIns="747713" bIns="0" rtlCol="0" anchor="t"/>
+          <a:bodyPr wrap="square" lIns="747713" tIns="0" rIns="747713" bIns="747713" rtlCol="0" anchor="b"/>
           <a:lstStyle/>
           <a:p>
             <a:pPr algn="r" indent="0" marL="0">
@@ -37578,8 +37410,8 @@
         </p:nvSpPr>
         <p:spPr>
           <a:xfrm>
-            <a:off x="0" y="5762625"/>
-            <a:ext cx="12192000" cy="1095375"/>
+            <a:off x="0" y="0"/>
+            <a:ext cx="12192000" cy="6858000"/>
           </a:xfrm>
           <a:prstGeom prst="rect">
             <a:avLst/>
@@ -37588,7 +37420,7 @@
           <a:ln/>
         </p:spPr>
         <p:txBody>
-          <a:bodyPr wrap="square" lIns="0" tIns="0" rIns="747713" bIns="0" rtlCol="0" anchor="t"/>
+          <a:bodyPr wrap="square" lIns="747713" tIns="0" rIns="747713" bIns="747713" rtlCol="0" anchor="b"/>
           <a:lstStyle/>
           <a:p>
             <a:pPr algn="r" indent="0" marL="0">
@@ -38050,8 +37882,8 @@
         </p:nvSpPr>
         <p:spPr>
           <a:xfrm>
-            <a:off x="0" y="5762625"/>
-            <a:ext cx="12192000" cy="1095375"/>
+            <a:off x="0" y="0"/>
+            <a:ext cx="12192000" cy="6858000"/>
           </a:xfrm>
           <a:prstGeom prst="rect">
             <a:avLst/>
@@ -38060,7 +37892,7 @@
           <a:ln/>
         </p:spPr>
         <p:txBody>
-          <a:bodyPr wrap="square" lIns="0" tIns="0" rIns="747713" bIns="0" rtlCol="0" anchor="t"/>
+          <a:bodyPr wrap="square" lIns="747713" tIns="0" rIns="747713" bIns="747713" rtlCol="0" anchor="b"/>
           <a:lstStyle/>
           <a:p>
             <a:pPr algn="r" indent="0" marL="0">
@@ -39321,8 +39153,8 @@
         </p:nvSpPr>
         <p:spPr>
           <a:xfrm>
-            <a:off x="0" y="5762625"/>
-            <a:ext cx="12192000" cy="1095375"/>
+            <a:off x="0" y="0"/>
+            <a:ext cx="12192000" cy="6858000"/>
           </a:xfrm>
           <a:prstGeom prst="rect">
             <a:avLst/>
@@ -39331,7 +39163,7 @@
           <a:ln/>
         </p:spPr>
         <p:txBody>
-          <a:bodyPr wrap="square" lIns="0" tIns="0" rIns="747713" bIns="0" rtlCol="0" anchor="t"/>
+          <a:bodyPr wrap="square" lIns="747713" tIns="0" rIns="747713" bIns="747713" rtlCol="0" anchor="b"/>
           <a:lstStyle/>
           <a:p>
             <a:pPr algn="r" indent="0" marL="0">
